--- a/2025年度_Snowflake事業事業報告.pptx
+++ b/2025年度_Snowflake事業事業報告.pptx
@@ -35240,7 +35240,7 @@
                         <a:rPr sz="750">
                           <a:latin typeface="Yu Gothic UI"/>
                         </a:rPr>
-                        <a:t>30,323,952円</a:t>
+                        <a:t>39,992,938円</a:t>
                       </a:r>
                     </a:p>
                   </a:txBody>
@@ -35272,7 +35272,7 @@
                         <a:rPr sz="750" b="1">
                           <a:latin typeface="Yu Gothic UI"/>
                         </a:rPr>
-                        <a:t>27,266,162円</a:t>
+                        <a:t>36,935,141円</a:t>
                       </a:r>
                     </a:p>
                   </a:txBody>
@@ -35446,7 +35446,7 @@
                         <a:rPr sz="750">
                           <a:latin typeface="Yu Gothic UI"/>
                         </a:rPr>
-                        <a:t>5,514,852円</a:t>
+                        <a:t>7,998,588円</a:t>
                       </a:r>
                     </a:p>
                     <a:p>
@@ -35455,7 +35455,7 @@
                         <a:rPr sz="650">
                           <a:latin typeface="Yu Gothic UI"/>
                         </a:rPr>
-                        <a:t>(粗利率18.2%)</a:t>
+                        <a:t>(粗利率20.0%)</a:t>
                       </a:r>
                     </a:p>
                   </a:txBody>
@@ -35495,7 +35495,7 @@
                         <a:rPr sz="750" b="1">
                           <a:latin typeface="Yu Gothic UI"/>
                         </a:rPr>
-                        <a:t>11,073,378円</a:t>
+                        <a:t>20,742,357円</a:t>
                       </a:r>
                     </a:p>
                     <a:p>
@@ -35504,7 +35504,7 @@
                         <a:rPr sz="650" b="1">
                           <a:latin typeface="Yu Gothic UI"/>
                         </a:rPr>
-                        <a:t>(粗利率40.6%)</a:t>
+                        <a:t>(粗利率56.2%)</a:t>
                       </a:r>
                     </a:p>
                   </a:txBody>
@@ -35629,7 +35629,7 @@
                           </a:solidFill>
                           <a:latin typeface="Yu Gothic UI"/>
                         </a:rPr>
-                        <a:t>30,673,830円</a:t>
+                        <a:t>30,484,450円</a:t>
                       </a:r>
                     </a:p>
                   </a:txBody>
@@ -35751,7 +35751,7 @@
                           </a:solidFill>
                           <a:latin typeface="Yu Gothic UI"/>
                         </a:rPr>
-                        <a:t>△19,600,452円</a:t>
+                        <a:t>△9,742,093円</a:t>
                       </a:r>
                     </a:p>
                     <a:p>
@@ -35763,7 +35763,7 @@
                           </a:solidFill>
                           <a:latin typeface="Yu Gothic UI"/>
                         </a:rPr>
-                        <a:t>(△71.9%)</a:t>
+                        <a:t>(△26.4%)</a:t>
                       </a:r>
                     </a:p>
                   </a:txBody>
@@ -35875,7 +35875,7 @@
                         <a:rPr sz="750" b="1">
                           <a:latin typeface="Yu Gothic UI"/>
                         </a:rPr>
-                        <a:t>粗利率40.6%</a:t>
+                        <a:t>粗利率56.2%</a:t>
                       </a:r>
                     </a:p>
                   </a:txBody>
@@ -36031,7 +36031,7 @@
                 </a:solidFill>
                 <a:latin typeface="Yu Gothic UI"/>
               </a:rPr>
-              <a:t>※管理費・間接費配賦は未確定（0円として計上）　※販管費は事業推進・管理人件費（松浦・江口・若宮）の合計</a:t>
+              <a:t>※管理費・間接費配賦：0円（計上なし）　※販管費は事業推進・管理人件費（松浦・江口・若宮）の合計　※人件費：松浦・若宮は月額×稼働率、江口は日額×稼働日数で計上</a:t>
             </a:r>
           </a:p>
         </p:txBody>
@@ -37103,7 +37103,7 @@
                 </a:solidFill>
                 <a:latin typeface="Yu Gothic UI"/>
               </a:rPr>
-              <a:t>■ 事業推進・管理人件費（3名）月次内訳　年間合計: 30,673,830円</a:t>
+              <a:t>■ 事業推進・管理人件費（3名）月次内訳　年間合計: 30,484,450円</a:t>
             </a:r>
           </a:p>
         </p:txBody>
@@ -37585,7 +37585,7 @@
                         <a:rPr sz="650">
                           <a:latin typeface="Yu Gothic UI"/>
                         </a:rPr>
-                        <a:t>1,096,400</a:t>
+                        <a:t>3,188,000</a:t>
                       </a:r>
                     </a:p>
                   </a:txBody>
@@ -37601,7 +37601,7 @@
                         <a:rPr sz="650">
                           <a:latin typeface="Yu Gothic UI"/>
                         </a:rPr>
-                        <a:t>804,360</a:t>
+                        <a:t>3,188,000</a:t>
                       </a:r>
                     </a:p>
                   </a:txBody>
@@ -37617,7 +37617,7 @@
                         <a:rPr sz="650">
                           <a:latin typeface="Yu Gothic UI"/>
                         </a:rPr>
-                        <a:t>804,360</a:t>
+                        <a:t>3,188,000</a:t>
                       </a:r>
                     </a:p>
                   </a:txBody>
@@ -37633,7 +37633,7 @@
                         <a:rPr sz="650">
                           <a:latin typeface="Yu Gothic UI"/>
                         </a:rPr>
-                        <a:t>1,096,400</a:t>
+                        <a:t>3,188,000</a:t>
                       </a:r>
                     </a:p>
                   </a:txBody>
@@ -37649,7 +37649,7 @@
                         <a:rPr sz="650">
                           <a:latin typeface="Yu Gothic UI"/>
                         </a:rPr>
-                        <a:t>1,096,400</a:t>
+                        <a:t>3,188,000</a:t>
                       </a:r>
                     </a:p>
                   </a:txBody>
@@ -37665,7 +37665,7 @@
                         <a:rPr sz="650">
                           <a:latin typeface="Yu Gothic UI"/>
                         </a:rPr>
-                        <a:t>1,096,400</a:t>
+                        <a:t>3,188,000</a:t>
                       </a:r>
                     </a:p>
                   </a:txBody>
@@ -37681,7 +37681,7 @@
                         <a:rPr sz="650">
                           <a:latin typeface="Yu Gothic UI"/>
                         </a:rPr>
-                        <a:t>1,096,400</a:t>
+                        <a:t>3,188,000</a:t>
                       </a:r>
                     </a:p>
                   </a:txBody>
@@ -37697,7 +37697,7 @@
                         <a:rPr sz="650">
                           <a:latin typeface="Yu Gothic UI"/>
                         </a:rPr>
-                        <a:t>1,096,400</a:t>
+                        <a:t>3,188,000</a:t>
                       </a:r>
                     </a:p>
                   </a:txBody>
@@ -37713,7 +37713,7 @@
                         <a:rPr sz="650">
                           <a:latin typeface="Yu Gothic UI"/>
                         </a:rPr>
-                        <a:t>1,096,400</a:t>
+                        <a:t>3,188,000</a:t>
                       </a:r>
                     </a:p>
                   </a:txBody>
@@ -37729,7 +37729,7 @@
                         <a:rPr sz="650">
                           <a:latin typeface="Yu Gothic UI"/>
                         </a:rPr>
-                        <a:t>1,096,400</a:t>
+                        <a:t>3,188,000</a:t>
                       </a:r>
                     </a:p>
                   </a:txBody>
@@ -37745,7 +37745,7 @@
                         <a:rPr sz="650">
                           <a:latin typeface="Yu Gothic UI"/>
                         </a:rPr>
-                        <a:t>1,096,400</a:t>
+                        <a:t>3,188,000</a:t>
                       </a:r>
                     </a:p>
                   </a:txBody>
@@ -37761,7 +37761,7 @@
                         <a:rPr sz="650">
                           <a:latin typeface="Yu Gothic UI"/>
                         </a:rPr>
-                        <a:t>1,096,400</a:t>
+                        <a:t>3,188,000</a:t>
                       </a:r>
                     </a:p>
                   </a:txBody>
@@ -37777,7 +37777,7 @@
                         <a:rPr sz="700" b="1">
                           <a:latin typeface="Yu Gothic UI"/>
                         </a:rPr>
-                        <a:t>13,176,004</a:t>
+                        <a:t>24,228,800</a:t>
                       </a:r>
                     </a:p>
                   </a:txBody>
@@ -37823,7 +37823,7 @@
                         <a:rPr sz="650">
                           <a:latin typeface="Yu Gothic UI"/>
                         </a:rPr>
-                        <a:t>2,245,800</a:t>
+                        <a:t>308,500</a:t>
                       </a:r>
                     </a:p>
                   </a:txBody>
@@ -37839,7 +37839,7 @@
                         <a:rPr sz="650">
                           <a:latin typeface="Yu Gothic UI"/>
                         </a:rPr>
-                        <a:t>1,757,300</a:t>
+                        <a:t>308,500</a:t>
                       </a:r>
                     </a:p>
                   </a:txBody>
@@ -37855,7 +37855,7 @@
                         <a:rPr sz="650">
                           <a:latin typeface="Yu Gothic UI"/>
                         </a:rPr>
-                        <a:t>1,188,710</a:t>
+                        <a:t>308,500</a:t>
                       </a:r>
                     </a:p>
                   </a:txBody>
@@ -37871,7 +37871,7 @@
                         <a:rPr sz="650">
                           <a:latin typeface="Yu Gothic UI"/>
                         </a:rPr>
-                        <a:t>3,325,600</a:t>
+                        <a:t>308,500</a:t>
                       </a:r>
                     </a:p>
                   </a:txBody>
@@ -37887,7 +37887,7 @@
                         <a:rPr sz="650">
                           <a:latin typeface="Yu Gothic UI"/>
                         </a:rPr>
-                        <a:t>1,412,800</a:t>
+                        <a:t>308,500</a:t>
                       </a:r>
                     </a:p>
                   </a:txBody>
@@ -37903,7 +37903,7 @@
                         <a:rPr sz="650">
                           <a:latin typeface="Yu Gothic UI"/>
                         </a:rPr>
-                        <a:t>1,412,800</a:t>
+                        <a:t>308,500</a:t>
                       </a:r>
                     </a:p>
                   </a:txBody>
@@ -37919,7 +37919,7 @@
                         <a:rPr sz="650">
                           <a:latin typeface="Yu Gothic UI"/>
                         </a:rPr>
-                        <a:t>970,600</a:t>
+                        <a:t>308,500</a:t>
                       </a:r>
                     </a:p>
                   </a:txBody>
@@ -37935,7 +37935,7 @@
                         <a:rPr sz="650">
                           <a:latin typeface="Yu Gothic UI"/>
                         </a:rPr>
-                        <a:t>1,235,400</a:t>
+                        <a:t>308,500</a:t>
                       </a:r>
                     </a:p>
                   </a:txBody>
@@ -37951,7 +37951,7 @@
                         <a:rPr sz="650">
                           <a:latin typeface="Yu Gothic UI"/>
                         </a:rPr>
-                        <a:t>1,040,650</a:t>
+                        <a:t>308,500</a:t>
                       </a:r>
                     </a:p>
                   </a:txBody>
@@ -37967,7 +37967,7 @@
                         <a:rPr sz="650">
                           <a:latin typeface="Yu Gothic UI"/>
                         </a:rPr>
-                        <a:t>1,040,650</a:t>
+                        <a:t>308,500</a:t>
                       </a:r>
                     </a:p>
                   </a:txBody>
@@ -37983,7 +37983,7 @@
                         <a:rPr sz="650">
                           <a:latin typeface="Yu Gothic UI"/>
                         </a:rPr>
-                        <a:t>1,235,400</a:t>
+                        <a:t>308,500</a:t>
                       </a:r>
                     </a:p>
                   </a:txBody>
@@ -37999,7 +37999,7 @@
                         <a:rPr sz="650">
                           <a:latin typeface="Yu Gothic UI"/>
                         </a:rPr>
-                        <a:t>1,235,400</a:t>
+                        <a:t>308,500</a:t>
                       </a:r>
                     </a:p>
                   </a:txBody>
@@ -38015,7 +38015,7 @@
                         <a:rPr sz="700" b="1">
                           <a:latin typeface="Yu Gothic UI"/>
                         </a:rPr>
-                        <a:t>13,992,326</a:t>
+                        <a:t>5,398,750</a:t>
                       </a:r>
                     </a:p>
                   </a:txBody>
@@ -38238,7 +38238,7 @@
                         <a:rPr sz="650">
                           <a:latin typeface="Yu Gothic UI"/>
                         </a:rPr>
-                        <a:t>876,300</a:t>
+                        <a:t>779,000</a:t>
                       </a:r>
                     </a:p>
                   </a:txBody>
@@ -38258,7 +38258,7 @@
                         <a:rPr sz="650">
                           <a:latin typeface="Yu Gothic UI"/>
                         </a:rPr>
-                        <a:t>876,300</a:t>
+                        <a:t>779,000</a:t>
                       </a:r>
                     </a:p>
                   </a:txBody>
@@ -38278,7 +38278,7 @@
                         <a:rPr sz="650">
                           <a:latin typeface="Yu Gothic UI"/>
                         </a:rPr>
-                        <a:t>876,300</a:t>
+                        <a:t>779,000</a:t>
                       </a:r>
                     </a:p>
                   </a:txBody>
@@ -38298,7 +38298,7 @@
                         <a:rPr sz="650">
                           <a:latin typeface="Yu Gothic UI"/>
                         </a:rPr>
-                        <a:t>876,300</a:t>
+                        <a:t>779,000</a:t>
                       </a:r>
                     </a:p>
                   </a:txBody>
@@ -38318,7 +38318,7 @@
                         <a:rPr sz="650">
                           <a:latin typeface="Yu Gothic UI"/>
                         </a:rPr>
-                        <a:t>876,300</a:t>
+                        <a:t>779,000</a:t>
                       </a:r>
                     </a:p>
                   </a:txBody>
@@ -38338,7 +38338,7 @@
                         <a:rPr sz="700" b="1">
                           <a:latin typeface="Yu Gothic UI"/>
                         </a:rPr>
-                        <a:t>3,505,500</a:t>
+                        <a:t>856,900</a:t>
                       </a:r>
                     </a:p>
                   </a:txBody>
@@ -38391,7 +38391,7 @@
                           </a:solidFill>
                           <a:latin typeface="Yu Gothic UI"/>
                         </a:rPr>
-                        <a:t>3,342,200</a:t>
+                        <a:t>1,727,650</a:t>
                       </a:r>
                     </a:p>
                   </a:txBody>
@@ -38414,7 +38414,7 @@
                           </a:solidFill>
                           <a:latin typeface="Yu Gothic UI"/>
                         </a:rPr>
-                        <a:t>2,561,660</a:t>
+                        <a:t>1,727,650</a:t>
                       </a:r>
                     </a:p>
                   </a:txBody>
@@ -38437,7 +38437,7 @@
                           </a:solidFill>
                           <a:latin typeface="Yu Gothic UI"/>
                         </a:rPr>
-                        <a:t>1,993,070</a:t>
+                        <a:t>1,727,650</a:t>
                       </a:r>
                     </a:p>
                   </a:txBody>
@@ -38460,7 +38460,7 @@
                           </a:solidFill>
                           <a:latin typeface="Yu Gothic UI"/>
                         </a:rPr>
-                        <a:t>4,422,000</a:t>
+                        <a:t>0</a:t>
                       </a:r>
                     </a:p>
                   </a:txBody>
@@ -38483,7 +38483,7 @@
                           </a:solidFill>
                           <a:latin typeface="Yu Gothic UI"/>
                         </a:rPr>
-                        <a:t>2,509,200</a:t>
+                        <a:t>1,912,800</a:t>
                       </a:r>
                     </a:p>
                   </a:txBody>
@@ -38506,7 +38506,7 @@
                           </a:solidFill>
                           <a:latin typeface="Yu Gothic UI"/>
                         </a:rPr>
-                        <a:t>2,509,200</a:t>
+                        <a:t>1,912,800</a:t>
                       </a:r>
                     </a:p>
                   </a:txBody>
@@ -38529,7 +38529,7 @@
                           </a:solidFill>
                           <a:latin typeface="Yu Gothic UI"/>
                         </a:rPr>
-                        <a:t>2,067,000</a:t>
+                        <a:t>3,002,850</a:t>
                       </a:r>
                     </a:p>
                   </a:txBody>
@@ -38552,7 +38552,7 @@
                           </a:solidFill>
                           <a:latin typeface="Yu Gothic UI"/>
                         </a:rPr>
-                        <a:t>2,331,800</a:t>
+                        <a:t>2,869,200</a:t>
                       </a:r>
                     </a:p>
                   </a:txBody>
@@ -38575,7 +38575,7 @@
                           </a:solidFill>
                           <a:latin typeface="Yu Gothic UI"/>
                         </a:rPr>
-                        <a:t>2,137,050</a:t>
+                        <a:t>3,063,950</a:t>
                       </a:r>
                     </a:p>
                   </a:txBody>
@@ -38598,7 +38598,7 @@
                           </a:solidFill>
                           <a:latin typeface="Yu Gothic UI"/>
                         </a:rPr>
-                        <a:t>2,137,050</a:t>
+                        <a:t>4,309,800</a:t>
                       </a:r>
                     </a:p>
                   </a:txBody>
@@ -38621,7 +38621,7 @@
                           </a:solidFill>
                           <a:latin typeface="Yu Gothic UI"/>
                         </a:rPr>
-                        <a:t>2,331,800</a:t>
+                        <a:t>4,115,050</a:t>
                       </a:r>
                     </a:p>
                   </a:txBody>
@@ -38644,7 +38644,7 @@
                           </a:solidFill>
                           <a:latin typeface="Yu Gothic UI"/>
                         </a:rPr>
-                        <a:t>2,331,800</a:t>
+                        <a:t>4,115,050</a:t>
                       </a:r>
                     </a:p>
                   </a:txBody>
@@ -38667,7 +38667,7 @@
                           </a:solidFill>
                           <a:latin typeface="Yu Gothic UI"/>
                         </a:rPr>
-                        <a:t>30,673,830</a:t>
+                        <a:t>30,484,450</a:t>
                       </a:r>
                     </a:p>
                   </a:txBody>
@@ -38696,7 +38696,7 @@
         <p:spPr>
           <a:xfrm>
             <a:off x="196053" y="3700000"/>
-            <a:ext cx="9504002" cy="2500000"/>
+            <a:ext cx="9504002" cy="1300000"/>
           </a:xfrm>
           <a:prstGeom prst="rect">
             <a:avLst/>
@@ -38736,7 +38736,7 @@
                 </a:solidFill>
                 <a:latin typeface="Yu Gothic UI"/>
               </a:rPr>
-              <a:t>▶ 松浦（年間 13,176,004円）：上期・下期通じて事業推進担当</a:t>
+              <a:t>▶ 松浦（年間 24,228,800円）：上期・下期通じて事業推進担当</a:t>
             </a:r>
           </a:p>
           <a:p>
@@ -38748,7 +38748,7 @@
                 </a:solidFill>
                 <a:latin typeface="Yu Gothic UI"/>
               </a:rPr>
-              <a:t>▶ 江口（年間 13,992,326円）：上期・下期通じて事業管理担当（7月は特別支出含む）</a:t>
+              <a:t>▶ 江口（年間 5,398,750円）：日額308,500円×稼働日数制</a:t>
             </a:r>
           </a:p>
           <a:p>
@@ -38760,7 +38760,7 @@
                 </a:solidFill>
                 <a:latin typeface="Yu Gothic UI"/>
               </a:rPr>
-              <a:t>▶ 若宮（年間 3,505,500円）：11月参画（下期より）。11月〜3月の5ヶ月間</a:t>
+              <a:t>▶ 若宮（年間 856,900円）：11月参画（下期より）。11月〜3月の5ヶ月間</a:t>
             </a:r>
           </a:p>
           <a:p>
@@ -38768,11 +38768,12 @@
             <a:r>
               <a:rPr sz="850">
                 <a:solidFill>
-                  <a:srgbClr val="CC0000"/>
+                  <a:srgbClr val="333333"/>
                 </a:solidFill>
                 <a:latin typeface="Yu Gothic UI"/>
               </a:rPr>
-              <a:t>▶ 管理費・間接費配賦：確認中（現在は 0円として計上）</a:t>
+              <a:t>▶ 管理費・間接費配賦：0円（計上なし）
+※稼働率はKPI管理用。人件費：松浦・若宮は月額×稼働率、江口は日額×稼働日数で計上</a:t>
             </a:r>
           </a:p>
           <a:p>
@@ -38785,6 +38786,442 @@
                 <a:latin typeface="Yu Gothic UI"/>
               </a:rPr>
               <a:t>▶ 2026年度に向けての課題：売上拡大による人件費回収・損益改善が最重要テーマ</a:t>
+            </a:r>
+          </a:p>
+        </p:txBody>
+      </p:sp>
+      <p:sp>
+        <p:nvSpPr>
+          <p:cNvPr id="60" name="TextBox KPI Title"/>
+          <p:cNvSpPr txBox="1"/>
+          <p:nvPr/>
+        </p:nvSpPr>
+        <p:spPr>
+          <a:xfrm>
+            <a:off x="196053" y="5060000"/>
+            <a:ext cx="9504002" cy="280000"/>
+          </a:xfrm>
+          <a:prstGeom prst="rect">
+            <a:avLst/>
+          </a:prstGeom>
+          <a:noFill/>
+        </p:spPr>
+        <p:txBody>
+          <a:bodyPr wrap="square">
+            <a:spAutoFit/>
+          </a:bodyPr>
+          <a:lstStyle/>
+          <a:p>
+            <a:pPr algn="l"/>
+            <a:r>
+              <a:rPr sz="900" b="1">
+                <a:solidFill>
+                  <a:srgbClr val="000F78"/>
+                </a:solidFill>
+                <a:latin typeface="Yu Gothic UI"/>
+              </a:rPr>
+              <a:t>「稼働率KPI（年間）」</a:t>
+            </a:r>
+          </a:p>
+        </p:txBody>
+      </p:sp>
+      <p:graphicFrame>
+        <p:nvGraphicFramePr>
+          <p:cNvPr id="61" name="Table KPI"/>
+          <p:cNvGraphicFramePr>
+            <a:graphicFrameLocks noGrp="1"/>
+          </p:cNvGraphicFramePr>
+          <p:nvPr/>
+        </p:nvGraphicFramePr>
+        <p:xfrm>
+          <a:off x="196053" y="5380000"/>
+          <a:ext cx="9504002" cy="1200000"/>
+        </p:xfrm>
+        <a:graphic>
+          <a:graphicData uri="http://schemas.openxmlformats.org/drawingml/2006/table">
+            <a:tbl>
+              <a:tblPr firstRow="1" bandRow="1">
+                <a:tableStyleId>{5C22544A-7EE6-4342-B048-85BDC9FD1C3A}</a:tableStyleId>
+              </a:tblPr>
+              <a:tblGrid>
+                <a:gridCol w="900000"/>
+                <a:gridCol w="1400000"/>
+                <a:gridCol w="1200000"/>
+                <a:gridCol w="6004002"/>
+              </a:tblGrid>
+              <a:tr h="280000">
+                <a:tc>
+                  <a:txBody>
+                    <a:bodyPr/>
+                    <a:lstStyle/>
+                    <a:p>
+                      <a:pPr algn="ctr"/>
+                      <a:r>
+                        <a:rPr sz="700" b="1">
+                          <a:solidFill>
+                            <a:srgbClr val="FFFFFF"/>
+                          </a:solidFill>
+                          <a:latin typeface="Yu Gothic UI"/>
+                        </a:rPr>
+                        <a:t>氏名</a:t>
+                      </a:r>
+                    </a:p>
+                  </a:txBody>
+                  <a:tcPr>
+                    <a:solidFill>
+                      <a:srgbClr val="000F78"/>
+                    </a:solidFill>
+                  </a:tcPr>
+                </a:tc>
+                <a:tc>
+                  <a:txBody>
+                    <a:bodyPr/>
+                    <a:lstStyle/>
+                    <a:p>
+                      <a:pPr algn="ctr"/>
+                      <a:r>
+                        <a:rPr sz="700" b="1">
+                          <a:solidFill>
+                            <a:srgbClr val="FFFFFF"/>
+                          </a:solidFill>
+                          <a:latin typeface="Yu Gothic UI"/>
+                        </a:rPr>
+                        <a:t>計算方式</a:t>
+                      </a:r>
+                    </a:p>
+                  </a:txBody>
+                  <a:tcPr>
+                    <a:solidFill>
+                      <a:srgbClr val="000F78"/>
+                    </a:solidFill>
+                  </a:tcPr>
+                </a:tc>
+                <a:tc>
+                  <a:txBody>
+                    <a:bodyPr/>
+                    <a:lstStyle/>
+                    <a:p>
+                      <a:pPr algn="ctr"/>
+                      <a:r>
+                        <a:rPr sz="700" b="1">
+                          <a:solidFill>
+                            <a:srgbClr val="FFFFFF"/>
+                          </a:solidFill>
+                          <a:latin typeface="Yu Gothic UI"/>
+                        </a:rPr>
+                        <a:t>年間平均稼働率</a:t>
+                      </a:r>
+                    </a:p>
+                  </a:txBody>
+                  <a:tcPr>
+                    <a:solidFill>
+                      <a:srgbClr val="000F78"/>
+                    </a:solidFill>
+                  </a:tcPr>
+                </a:tc>
+                <a:tc>
+                  <a:txBody>
+                    <a:bodyPr/>
+                    <a:lstStyle/>
+                    <a:p>
+                      <a:pPr algn="ctr"/>
+                      <a:r>
+                        <a:rPr sz="700" b="1">
+                          <a:solidFill>
+                            <a:srgbClr val="FFFFFF"/>
+                          </a:solidFill>
+                          <a:latin typeface="Yu Gothic UI"/>
+                        </a:rPr>
+                        <a:t>傾向・コメント</a:t>
+                      </a:r>
+                    </a:p>
+                  </a:txBody>
+                  <a:tcPr>
+                    <a:solidFill>
+                      <a:srgbClr val="000F78"/>
+                    </a:solidFill>
+                  </a:tcPr>
+                </a:tc>
+              </a:tr>
+              <a:tr h="300000">
+                <a:tc>
+                  <a:txBody>
+                    <a:bodyPr/>
+                    <a:lstStyle/>
+                    <a:p>
+                      <a:pPr algn="ctr"/>
+                      <a:r>
+                        <a:rPr sz="700" b="1">
+                          <a:solidFill>
+                            <a:srgbClr val="000F78"/>
+                          </a:solidFill>
+                          <a:latin typeface="Yu Gothic UI"/>
+                        </a:rPr>
+                        <a:t>松浦</a:t>
+                      </a:r>
+                    </a:p>
+                  </a:txBody>
+                  <a:tcPr/>
+                </a:tc>
+                <a:tc>
+                  <a:txBody>
+                    <a:bodyPr/>
+                    <a:lstStyle/>
+                    <a:p>
+                      <a:pPr algn="ctr"/>
+                      <a:r>
+                        <a:rPr sz="650">
+                          <a:latin typeface="Yu Gothic UI"/>
+                        </a:rPr>
+                        <a:t>月額×稼働率</a:t>
+                      </a:r>
+                    </a:p>
+                  </a:txBody>
+                  <a:tcPr/>
+                </a:tc>
+                <a:tc>
+                  <a:txBody>
+                    <a:bodyPr/>
+                    <a:lstStyle/>
+                    <a:p>
+                      <a:pPr algn="ctr"/>
+                      <a:r>
+                        <a:rPr sz="700" b="1">
+                          <a:solidFill>
+                            <a:srgbClr val="000F78"/>
+                          </a:solidFill>
+                          <a:latin typeface="Yu Gothic UI"/>
+                        </a:rPr>
+                        <a:t>63.3%</a:t>
+                      </a:r>
+                    </a:p>
+                  </a:txBody>
+                  <a:tcPr/>
+                </a:tc>
+                <a:tc>
+                  <a:txBody>
+                    <a:bodyPr/>
+                    <a:lstStyle/>
+                    <a:p>
+                      <a:pPr algn="l"/>
+                      <a:r>
+                        <a:rPr sz="650">
+                          <a:latin typeface="Yu Gothic UI"/>
+                        </a:rPr>
+                        <a:t>上期低稼働→下期フル稼働。事業立ち上げに伴い下期集中</a:t>
+                      </a:r>
+                    </a:p>
+                    <a:p>
+                      <a:pPr algn="l"/>
+                      <a:r>
+                        <a:rPr sz="570">
+                          <a:solidFill>
+                            <a:srgbClr val="666666"/>
+                          </a:solidFill>
+                          <a:latin typeface="Yu Gothic UI"/>
+                        </a:rPr>
+                        <a:t>（4朎0.3→5朎0.3→6朎0.3→7朎0→8朎0.6→9朎0.6→10朎0.7→11朎0.9→12朎0.9→1朎1.0→2朎1.0→3朎1.0）</a:t>
+                      </a:r>
+                    </a:p>
+                  </a:txBody>
+                  <a:tcPr/>
+                </a:tc>
+              </a:tr>
+              <a:tr h="280000">
+                <a:tc>
+                  <a:txBody>
+                    <a:bodyPr/>
+                    <a:lstStyle/>
+                    <a:p>
+                      <a:pPr algn="ctr"/>
+                      <a:r>
+                        <a:rPr sz="700" b="1">
+                          <a:solidFill>
+                            <a:srgbClr val="000F78"/>
+                          </a:solidFill>
+                          <a:latin typeface="Yu Gothic UI"/>
+                        </a:rPr>
+                        <a:t>江口</a:t>
+                      </a:r>
+                    </a:p>
+                  </a:txBody>
+                  <a:tcPr>
+                    <a:solidFill>
+                      <a:srgbClr val="F5F5FF"/>
+                    </a:solidFill>
+                  </a:tcPr>
+                </a:tc>
+                <a:tc>
+                  <a:txBody>
+                    <a:bodyPr/>
+                    <a:lstStyle/>
+                    <a:p>
+                      <a:pPr algn="ctr"/>
+                      <a:r>
+                        <a:rPr sz="650">
+                          <a:latin typeface="Yu Gothic UI"/>
+                        </a:rPr>
+                        <a:t>日額×稼働日数</a:t>
+                      </a:r>
+                    </a:p>
+                  </a:txBody>
+                  <a:tcPr>
+                    <a:solidFill>
+                      <a:srgbClr val="F5F5FF"/>
+                    </a:solidFill>
+                  </a:tcPr>
+                </a:tc>
+                <a:tc>
+                  <a:txBody>
+                    <a:bodyPr/>
+                    <a:lstStyle/>
+                    <a:p>
+                      <a:pPr algn="ctr"/>
+                      <a:r>
+                        <a:rPr sz="700" b="1">
+                          <a:solidFill>
+                            <a:srgbClr val="000F78"/>
+                          </a:solidFill>
+                          <a:latin typeface="Yu Gothic UI"/>
+                        </a:rPr>
+                        <a:t>延17.5日</a:t>
+                      </a:r>
+                    </a:p>
+                  </a:txBody>
+                  <a:tcPr>
+                    <a:solidFill>
+                      <a:srgbClr val="F5F5FF"/>
+                    </a:solidFill>
+                  </a:tcPr>
+                </a:tc>
+                <a:tc>
+                  <a:txBody>
+                    <a:bodyPr/>
+                    <a:lstStyle/>
+                    <a:p>
+                      <a:pPr algn="l"/>
+                      <a:r>
+                        <a:rPr sz="650">
+                          <a:latin typeface="Yu Gothic UI"/>
+                        </a:rPr>
+                        <a:t>特定月のみ参画（4～6月・10月・1～3月）</a:t>
+                      </a:r>
+                    </a:p>
+                  </a:txBody>
+                  <a:tcPr>
+                    <a:solidFill>
+                      <a:srgbClr val="F5F5FF"/>
+                    </a:solidFill>
+                  </a:tcPr>
+                </a:tc>
+              </a:tr>
+              <a:tr h="280000">
+                <a:tc>
+                  <a:txBody>
+                    <a:bodyPr/>
+                    <a:lstStyle/>
+                    <a:p>
+                      <a:pPr algn="ctr"/>
+                      <a:r>
+                        <a:rPr sz="700" b="1">
+                          <a:solidFill>
+                            <a:srgbClr val="000F78"/>
+                          </a:solidFill>
+                          <a:latin typeface="Yu Gothic UI"/>
+                        </a:rPr>
+                        <a:t>若宮</a:t>
+                      </a:r>
+                    </a:p>
+                  </a:txBody>
+                  <a:tcPr/>
+                </a:tc>
+                <a:tc>
+                  <a:txBody>
+                    <a:bodyPr/>
+                    <a:lstStyle/>
+                    <a:p>
+                      <a:pPr algn="ctr"/>
+                      <a:r>
+                        <a:rPr sz="650">
+                          <a:latin typeface="Yu Gothic UI"/>
+                        </a:rPr>
+                        <a:t>月額×稼働率</a:t>
+                      </a:r>
+                    </a:p>
+                  </a:txBody>
+                  <a:tcPr/>
+                </a:tc>
+                <a:tc>
+                  <a:txBody>
+                    <a:bodyPr/>
+                    <a:lstStyle/>
+                    <a:p>
+                      <a:pPr algn="ctr"/>
+                      <a:r>
+                        <a:rPr sz="700" b="1">
+                          <a:solidFill>
+                            <a:srgbClr val="000F78"/>
+                          </a:solidFill>
+                          <a:latin typeface="Yu Gothic UI"/>
+                        </a:rPr>
+                        <a:t>27.5%</a:t>
+                      </a:r>
+                    </a:p>
+                  </a:txBody>
+                  <a:tcPr/>
+                </a:tc>
+                <a:tc>
+                  <a:txBody>
+                    <a:bodyPr/>
+                    <a:lstStyle/>
+                    <a:p>
+                      <a:pPr algn="l"/>
+                      <a:r>
+                        <a:rPr sz="650">
+                          <a:latin typeface="Yu Gothic UI"/>
+                        </a:rPr>
+                        <a:t>12月から参画。徐々に稼働増加予定</a:t>
+                      </a:r>
+                    </a:p>
+                  </a:txBody>
+                  <a:tcPr/>
+                </a:tc>
+              </a:tr>
+            </a:tbl>
+          </a:graphicData>
+        </a:graphic>
+      </p:graphicFrame>
+      <p:sp>
+        <p:nvSpPr>
+          <p:cNvPr id="62" name="TextBox KPI Note"/>
+          <p:cNvSpPr txBox="1"/>
+          <p:nvPr/>
+        </p:nvSpPr>
+        <p:spPr>
+          <a:xfrm>
+            <a:off x="196053" y="6610000"/>
+            <a:ext cx="9504002" cy="220000"/>
+          </a:xfrm>
+          <a:prstGeom prst="rect">
+            <a:avLst/>
+          </a:prstGeom>
+          <a:noFill/>
+        </p:spPr>
+        <p:txBody>
+          <a:bodyPr wrap="square">
+            <a:spAutoFit/>
+          </a:bodyPr>
+          <a:lstStyle/>
+          <a:p>
+            <a:pPr algn="l"/>
+            <a:r>
+              <a:rPr sz="650">
+                <a:solidFill>
+                  <a:srgbClr val="666666"/>
+                </a:solidFill>
+                <a:latin typeface="Yu Gothic UI"/>
+              </a:rPr>
+              <a:t>※稼働率向上（特に松浦の通年フル稼働化・若宮の早期立ち上げ）が2026年度の重点課題</a:t>
             </a:r>
           </a:p>
         </p:txBody>
@@ -39116,7 +39553,7 @@
                 </a:solidFill>
                 <a:latin typeface="Yu Gothic UI"/>
               </a:rPr>
-              <a:t>30,323,952円</a:t>
+              <a:t>39,992,938円</a:t>
             </a:r>
           </a:p>
         </p:txBody>
@@ -39230,7 +39667,7 @@
                 </a:solidFill>
                 <a:latin typeface="Yu Gothic UI"/>
               </a:rPr>
-              <a:t>5,514,852円</a:t>
+              <a:t>7,998,588円</a:t>
             </a:r>
           </a:p>
         </p:txBody>
@@ -39344,7 +39781,7 @@
                 </a:solidFill>
                 <a:latin typeface="Yu Gothic UI"/>
               </a:rPr>
-              <a:t>約18.2%</a:t>
+              <a:t>20.0%</a:t>
             </a:r>
           </a:p>
         </p:txBody>
@@ -39621,7 +40058,7 @@
                         <a:rPr sz="800">
                           <a:latin typeface="Yu Gothic UI"/>
                         </a:rPr>
-                        <a:t>WP支援①</a:t>
+                        <a:t>WP受注</a:t>
                       </a:r>
                     </a:p>
                   </a:txBody>
@@ -39637,7 +40074,7 @@
                         <a:rPr sz="800">
                           <a:latin typeface="Yu Gothic UI"/>
                         </a:rPr>
-                        <a:t>4月〜6月</a:t>
+                        <a:t>2025年10月</a:t>
                       </a:r>
                     </a:p>
                   </a:txBody>
@@ -39653,7 +40090,7 @@
                         <a:rPr sz="800">
                           <a:latin typeface="Yu Gothic UI"/>
                         </a:rPr>
-                        <a:t>3,902,814円</a:t>
+                        <a:t>1,300,938円</a:t>
                       </a:r>
                     </a:p>
                   </a:txBody>
@@ -39669,7 +40106,7 @@
                         <a:rPr sz="800">
                           <a:latin typeface="Yu Gothic UI"/>
                         </a:rPr>
-                        <a:t>663,414円</a:t>
+                        <a:t>260,188円</a:t>
                       </a:r>
                     </a:p>
                   </a:txBody>
@@ -39685,7 +40122,7 @@
                         <a:rPr sz="800">
                           <a:latin typeface="Yu Gothic UI"/>
                         </a:rPr>
-                        <a:t>17.0%</a:t>
+                        <a:t>20.0%</a:t>
                       </a:r>
                     </a:p>
                   </a:txBody>
@@ -39731,7 +40168,7 @@
                         <a:rPr sz="800">
                           <a:latin typeface="Yu Gothic UI"/>
                         </a:rPr>
-                        <a:t>WP支援②</a:t>
+                        <a:t>セマンティックライン共同受注</a:t>
                       </a:r>
                     </a:p>
                   </a:txBody>
@@ -39751,7 +40188,7 @@
                         <a:rPr sz="800">
                           <a:latin typeface="Yu Gothic UI"/>
                         </a:rPr>
-                        <a:t>10月</a:t>
+                        <a:t>2025年12月〜2026年1月</a:t>
                       </a:r>
                     </a:p>
                   </a:txBody>
@@ -39771,7 +40208,7 @@
                         <a:rPr sz="800">
                           <a:latin typeface="Yu Gothic UI"/>
                         </a:rPr>
-                        <a:t>1,300,938円</a:t>
+                        <a:t>1,848,000円</a:t>
                       </a:r>
                     </a:p>
                   </a:txBody>
@@ -39791,7 +40228,7 @@
                         <a:rPr sz="800">
                           <a:latin typeface="Yu Gothic UI"/>
                         </a:rPr>
-                        <a:t>221,138円</a:t>
+                        <a:t>369,600円</a:t>
                       </a:r>
                     </a:p>
                   </a:txBody>
@@ -39811,7 +40248,7 @@
                         <a:rPr sz="800">
                           <a:latin typeface="Yu Gothic UI"/>
                         </a:rPr>
-                        <a:t>17.0%</a:t>
+                        <a:t>20.0%</a:t>
                       </a:r>
                     </a:p>
                   </a:txBody>
@@ -39857,7 +40294,7 @@
                         <a:rPr sz="800">
                           <a:latin typeface="Yu Gothic UI"/>
                         </a:rPr>
-                        <a:t>セマンティックレイヤR&amp;D支援</a:t>
+                        <a:t>SMTB受注1</a:t>
                       </a:r>
                     </a:p>
                   </a:txBody>
@@ -39873,7 +40310,7 @@
                         <a:rPr sz="800">
                           <a:latin typeface="Yu Gothic UI"/>
                         </a:rPr>
-                        <a:t>12月〜1月</a:t>
+                        <a:t>2025年8月〜2025年11月</a:t>
                       </a:r>
                     </a:p>
                   </a:txBody>
@@ -39889,7 +40326,7 @@
                         <a:rPr sz="800">
                           <a:latin typeface="Yu Gothic UI"/>
                         </a:rPr>
-                        <a:t>1,848,000円</a:t>
+                        <a:t>9,620,000円</a:t>
                       </a:r>
                     </a:p>
                   </a:txBody>
@@ -39905,7 +40342,7 @@
                         <a:rPr sz="800">
                           <a:latin typeface="Yu Gothic UI"/>
                         </a:rPr>
-                        <a:t>1,442,500円</a:t>
+                        <a:t>1,924,000円</a:t>
                       </a:r>
                     </a:p>
                   </a:txBody>
@@ -39921,7 +40358,7 @@
                         <a:rPr sz="800">
                           <a:latin typeface="Yu Gothic UI"/>
                         </a:rPr>
-                        <a:t>78.1%</a:t>
+                        <a:t>20.0%</a:t>
                       </a:r>
                     </a:p>
                   </a:txBody>
@@ -39967,7 +40404,7 @@
                         <a:rPr sz="800">
                           <a:latin typeface="Yu Gothic UI"/>
                         </a:rPr>
-                        <a:t>SMTB支援</a:t>
+                        <a:t>ScalarDB受注</a:t>
                       </a:r>
                     </a:p>
                   </a:txBody>
@@ -39987,7 +40424,7 @@
                         <a:rPr sz="800">
                           <a:latin typeface="Yu Gothic UI"/>
                         </a:rPr>
-                        <a:t>8月〜3月</a:t>
+                        <a:t>2025年8月〜2025年10月</a:t>
                       </a:r>
                     </a:p>
                   </a:txBody>
@@ -40007,7 +40444,7 @@
                         <a:rPr sz="800">
                           <a:latin typeface="Yu Gothic UI"/>
                         </a:rPr>
-                        <a:t>11,820,800円</a:t>
+                        <a:t>8,369,000円</a:t>
                       </a:r>
                     </a:p>
                   </a:txBody>
@@ -40027,7 +40464,7 @@
                         <a:rPr sz="800">
                           <a:latin typeface="Yu Gothic UI"/>
                         </a:rPr>
-                        <a:t>1,619,200円</a:t>
+                        <a:t>1,673,800円</a:t>
                       </a:r>
                     </a:p>
                   </a:txBody>
@@ -40047,7 +40484,7 @@
                         <a:rPr sz="800">
                           <a:latin typeface="Yu Gothic UI"/>
                         </a:rPr>
-                        <a:t>13.7%</a:t>
+                        <a:t>20.0%</a:t>
                       </a:r>
                     </a:p>
                   </a:txBody>
@@ -40093,7 +40530,7 @@
                         <a:rPr sz="800">
                           <a:latin typeface="Yu Gothic UI"/>
                         </a:rPr>
-                        <a:t>ScalarDB支援</a:t>
+                        <a:t>WP受注（2期）</a:t>
                       </a:r>
                     </a:p>
                   </a:txBody>
@@ -40109,7 +40546,7 @@
                         <a:rPr sz="800">
                           <a:latin typeface="Yu Gothic UI"/>
                         </a:rPr>
-                        <a:t>8月〜10月</a:t>
+                        <a:t>2025年11月〜2026年3月</a:t>
                       </a:r>
                     </a:p>
                   </a:txBody>
@@ -40125,7 +40562,7 @@
                         <a:rPr sz="800">
                           <a:latin typeface="Yu Gothic UI"/>
                         </a:rPr>
-                        <a:t>2,216,400円</a:t>
+                        <a:t>9,235,000円</a:t>
                       </a:r>
                     </a:p>
                   </a:txBody>
@@ -40141,7 +40578,7 @@
                         <a:rPr sz="800">
                           <a:latin typeface="Yu Gothic UI"/>
                         </a:rPr>
-                        <a:t>303,600円</a:t>
+                        <a:t>1,847,000円</a:t>
                       </a:r>
                     </a:p>
                   </a:txBody>
@@ -40157,7 +40594,7 @@
                         <a:rPr sz="800">
                           <a:latin typeface="Yu Gothic UI"/>
                         </a:rPr>
-                        <a:t>13.7%</a:t>
+                        <a:t>20.0%</a:t>
                       </a:r>
                     </a:p>
                   </a:txBody>
@@ -40203,7 +40640,7 @@
                         <a:rPr sz="800">
                           <a:latin typeface="Yu Gothic UI"/>
                         </a:rPr>
-                        <a:t>WP支援③</a:t>
+                        <a:t>SMTB受注2</a:t>
                       </a:r>
                     </a:p>
                   </a:txBody>
@@ -40223,7 +40660,7 @@
                         <a:rPr sz="800">
                           <a:latin typeface="Yu Gothic UI"/>
                         </a:rPr>
-                        <a:t>11月〜3月</a:t>
+                        <a:t>2025年12月〜2026年3月</a:t>
                       </a:r>
                     </a:p>
                   </a:txBody>
@@ -40243,7 +40680,7 @@
                         <a:rPr sz="800">
                           <a:latin typeface="Yu Gothic UI"/>
                         </a:rPr>
-                        <a:t>9,235,000円</a:t>
+                        <a:t>9,620,000円</a:t>
                       </a:r>
                     </a:p>
                   </a:txBody>
@@ -40263,7 +40700,7 @@
                         <a:rPr sz="800">
                           <a:latin typeface="Yu Gothic UI"/>
                         </a:rPr>
-                        <a:t>1,265,000円</a:t>
+                        <a:t>1,924,000円</a:t>
                       </a:r>
                     </a:p>
                   </a:txBody>
@@ -40283,7 +40720,7 @@
                         <a:rPr sz="800">
                           <a:latin typeface="Yu Gothic UI"/>
                         </a:rPr>
-                        <a:t>13.7%</a:t>
+                        <a:t>20.0%</a:t>
                       </a:r>
                     </a:p>
                   </a:txBody>
@@ -40447,7 +40884,7 @@
                 </a:solidFill>
                 <a:latin typeface="Yu Gothic UI"/>
               </a:rPr>
-              <a:t>30,323,952円</a:t>
+              <a:t>39,992,938円</a:t>
             </a:r>
           </a:p>
         </p:txBody>
@@ -40675,7 +41112,7 @@
                 </a:solidFill>
                 <a:latin typeface="Yu Gothic UI"/>
               </a:rPr>
-              <a:t>5,514,852円</a:t>
+              <a:t>7,998,588円</a:t>
             </a:r>
           </a:p>
         </p:txBody>
@@ -42148,7 +42585,7 @@
               <a:rPr sz="900">
                 <a:latin typeface="Yu Gothic UI"/>
               </a:rPr>
-              <a:t>▶ 粗利率40.6%・粗利益11,073,378円を達成（事業立ち上げ期）</a:t>
+              <a:t>▶ 粗利率56.2%・粗利益20,742,357円を達成（事業立ち上げ期）</a:t>
             </a:r>
           </a:p>
         </p:txBody>
@@ -42428,7 +42865,7 @@
               <a:rPr sz="900">
                 <a:latin typeface="Yu Gothic UI"/>
               </a:rPr>
-              <a:t>▶ 営業利益：△19,600,452円（△71.9%）。販管費（人件費）30,673,830円が主因</a:t>
+              <a:t>▶ 営業利益：△9,742,093円（△26.4%）。販管費（人件費）30,484,450円が主因</a:t>
             </a:r>
           </a:p>
         </p:txBody>
@@ -42521,7 +42958,7 @@
               <a:rPr sz="900">
                 <a:latin typeface="Yu Gothic UI"/>
               </a:rPr>
-              <a:t>▶ 粗利率18.2%はまだ改善余地あり</a:t>
+              <a:t>▶ 粗利率20.0%（領域2）はまだ改善余地あり</a:t>
             </a:r>
           </a:p>
         </p:txBody>
@@ -42972,7 +43409,7 @@
                 </a:solidFill>
                 <a:latin typeface="Yu Gothic UI"/>
               </a:rPr>
-              <a:t>【総括】2025年度は事業立ち上げ期として3領域の事業基盤を構築し、粗利率40.6%という強固な収益構造を実現。一方、人件費（販管費30,673,830円）により営業利益は△19,600,452円。2026年度は売上拡大による人件費回収と損益改善を最優先課題とする。</a:t>
+              <a:t>【総括】2025年度は事業立ち上げ期として3領域の事業基盤を構築し、粗利率56.2%という強固な収益構造を実現。一方、人件費（販管費30,484,450円）により営業利益は△9,742,093円。2026年度は売上拡大による人件費回収と損益改善を最優先課題とする。人件費（松浦・若宮：月額×稼働率、江口：日額×稼働日数）計上後、営業損失△9.7百万円。管理費：0円（計上なし）。</a:t>
             </a:r>
           </a:p>
         </p:txBody>
